--- a/Week 9/Final_project/Ravenstack_Final_Pitch_V3.pptx
+++ b/Week 9/Final_project/Ravenstack_Final_Pitch_V3.pptx
@@ -1395,7 +1395,7 @@
               <a:buNone/>
             </a:pPr>
             <a:r>
-              <a:rPr lang="en-US" dirty="0">
+              <a:rPr lang="en-US">
                 <a:solidFill>
                   <a:srgbClr val="90CAF9"/>
                 </a:solidFill>
@@ -1403,10 +1403,10 @@
                 <a:ea typeface="Calibri" pitchFamily="34" charset="-122"/>
                 <a:cs typeface="Calibri" pitchFamily="34" charset="-120"/>
               </a:rPr>
-              <a:t>Churn </a:t>
-            </a:r>
-            <a:r>
-              <a:rPr lang="en-US" dirty="0" err="1">
+              <a:t>Churn Prediction</a:t>
+            </a:r>
+            <a:r>
+              <a:rPr lang="en-US" sz="1800">
                 <a:solidFill>
                   <a:srgbClr val="90CAF9"/>
                 </a:solidFill>
@@ -1414,7 +1414,7 @@
                 <a:ea typeface="Calibri" pitchFamily="34" charset="-122"/>
                 <a:cs typeface="Calibri" pitchFamily="34" charset="-120"/>
               </a:rPr>
-              <a:t>Predictio</a:t>
+              <a:t> </a:t>
             </a:r>
             <a:r>
               <a:rPr lang="en-US" sz="1800" dirty="0">
@@ -1425,7 +1425,7 @@
                 <a:ea typeface="Calibri" pitchFamily="34" charset="-122"/>
                 <a:cs typeface="Calibri" pitchFamily="34" charset="-120"/>
               </a:rPr>
-              <a:t> POC Approval</a:t>
+              <a:t>POC Approval</a:t>
             </a:r>
             <a:endParaRPr lang="en-US" sz="1800" dirty="0"/>
           </a:p>
